--- a/marketing/decks/phase-05-skill-scouting.pptx
+++ b/marketing/decks/phase-05-skill-scouting.pptx
@@ -2,24 +2,24 @@
 <file path=ppt/presentation.xml><?xml version="1.0" encoding="utf-8"?>
 <p:presentation xmlns:p="http://schemas.openxmlformats.org/presentationml/2006/main">
   <p:sldMasterIdLst>
-    <p:sldMasterId xmlns:r="http://schemas.openxmlformats.org/officeDocument/2006/relationships" id="2147483648" r:id="R1e2bd9bcf1ae4960"/>
+    <p:sldMasterId xmlns:r="http://schemas.openxmlformats.org/officeDocument/2006/relationships" id="2147483648" r:id="Rab97a48f5f654dd9"/>
   </p:sldMasterIdLst>
   <p:notesMasterIdLst>
-    <p:notesMasterId xmlns:r="http://schemas.openxmlformats.org/officeDocument/2006/relationships" r:id="R454e6b018e534c30"/>
+    <p:notesMasterId xmlns:r="http://schemas.openxmlformats.org/officeDocument/2006/relationships" r:id="R71c770d8e7bc4537"/>
   </p:notesMasterIdLst>
   <p:sldIdLst>
-    <p:sldId xmlns:r="http://schemas.openxmlformats.org/officeDocument/2006/relationships" id="256" r:id="R0c4690561fa14665"/>
-    <p:sldId xmlns:r="http://schemas.openxmlformats.org/officeDocument/2006/relationships" id="257" r:id="Rffbe00d257e94818"/>
-    <p:sldId xmlns:r="http://schemas.openxmlformats.org/officeDocument/2006/relationships" id="258" r:id="R675a31641be14005"/>
-    <p:sldId xmlns:r="http://schemas.openxmlformats.org/officeDocument/2006/relationships" id="259" r:id="R98639de174a649f4"/>
-    <p:sldId xmlns:r="http://schemas.openxmlformats.org/officeDocument/2006/relationships" id="260" r:id="Rfd3e503ef53b4f91"/>
-    <p:sldId xmlns:r="http://schemas.openxmlformats.org/officeDocument/2006/relationships" id="261" r:id="Rfba0eaa39c764842"/>
-    <p:sldId xmlns:r="http://schemas.openxmlformats.org/officeDocument/2006/relationships" id="262" r:id="Rf220966edf09433b"/>
-    <p:sldId xmlns:r="http://schemas.openxmlformats.org/officeDocument/2006/relationships" id="263" r:id="R83acbff8e6004468"/>
-    <p:sldId xmlns:r="http://schemas.openxmlformats.org/officeDocument/2006/relationships" id="264" r:id="Re495cac4abf44964"/>
-    <p:sldId xmlns:r="http://schemas.openxmlformats.org/officeDocument/2006/relationships" id="265" r:id="R221e9ac3059f427d"/>
-    <p:sldId xmlns:r="http://schemas.openxmlformats.org/officeDocument/2006/relationships" id="266" r:id="Raef6104b962c4d1e"/>
-    <p:sldId xmlns:r="http://schemas.openxmlformats.org/officeDocument/2006/relationships" id="267" r:id="R9ad57a68042244f7"/>
+    <p:sldId xmlns:r="http://schemas.openxmlformats.org/officeDocument/2006/relationships" id="256" r:id="R8ee163daeffd400b"/>
+    <p:sldId xmlns:r="http://schemas.openxmlformats.org/officeDocument/2006/relationships" id="257" r:id="R3320ec1cbc2d44e2"/>
+    <p:sldId xmlns:r="http://schemas.openxmlformats.org/officeDocument/2006/relationships" id="258" r:id="R5969d51d083d4b15"/>
+    <p:sldId xmlns:r="http://schemas.openxmlformats.org/officeDocument/2006/relationships" id="259" r:id="R5a32ba7816534734"/>
+    <p:sldId xmlns:r="http://schemas.openxmlformats.org/officeDocument/2006/relationships" id="260" r:id="R39ca8ecdc28b4c0a"/>
+    <p:sldId xmlns:r="http://schemas.openxmlformats.org/officeDocument/2006/relationships" id="261" r:id="R6090f6b9a4ab4722"/>
+    <p:sldId xmlns:r="http://schemas.openxmlformats.org/officeDocument/2006/relationships" id="262" r:id="Rbc967b4cfcd94270"/>
+    <p:sldId xmlns:r="http://schemas.openxmlformats.org/officeDocument/2006/relationships" id="263" r:id="R148923668b4e404f"/>
+    <p:sldId xmlns:r="http://schemas.openxmlformats.org/officeDocument/2006/relationships" id="264" r:id="R840952fd78c64c13"/>
+    <p:sldId xmlns:r="http://schemas.openxmlformats.org/officeDocument/2006/relationships" id="265" r:id="Rc81404bd895e46a1"/>
+    <p:sldId xmlns:r="http://schemas.openxmlformats.org/officeDocument/2006/relationships" id="266" r:id="Re6372310cf1e48e2"/>
+    <p:sldId xmlns:r="http://schemas.openxmlformats.org/officeDocument/2006/relationships" id="267" r:id="R760cabcc30154e61"/>
   </p:sldIdLst>
   <p:sldSz cx="12192000" cy="6858000"/>
   <p:notesSz cx="6858000" cy="9144000"/>
@@ -476,7 +476,7 @@
           <a:lstStyle xmlns:a="http://schemas.openxmlformats.org/drawingml/2006/main"/>
           <a:p xmlns:a="http://schemas.openxmlformats.org/drawingml/2006/main">
             <a:r>
-              <a:t>Teach from docs/phases/05 and docs/ai-program/skills.\n\n[Sources]\n- marketing/lesson-plans/phase-05.md\n[/Sources]</a:t>
+              <a:t>Teach from docs/phases/05 and docs/ai-program.\n\n[Sources]\n- marketing/lesson-plans/phase-05.md\n[/Sources]</a:t>
             </a:r>
           </a:p>
         </p:txBody>
@@ -546,7 +546,7 @@
           <a:lstStyle xmlns:a="http://schemas.openxmlformats.org/drawingml/2006/main"/>
           <a:p xmlns:a="http://schemas.openxmlformats.org/drawingml/2006/main">
             <a:r>
-              <a:t>Teach from docs/phases/05 and docs/ai-program/skills.\n\n[Sources]\n- marketing/lesson-plans/phase-05.md\n[/Sources]</a:t>
+              <a:t>Teach from docs/phases/05 and docs/ai-program.\n\n[Sources]\n- marketing/lesson-plans/phase-05.md\n[/Sources]</a:t>
             </a:r>
           </a:p>
         </p:txBody>
@@ -616,7 +616,7 @@
           <a:lstStyle xmlns:a="http://schemas.openxmlformats.org/drawingml/2006/main"/>
           <a:p xmlns:a="http://schemas.openxmlformats.org/drawingml/2006/main">
             <a:r>
-              <a:t>Teach from docs/phases/05 and docs/ai-program/skills.\n\n[Sources]\n- marketing/lesson-plans/phase-05.md\n[/Sources]</a:t>
+              <a:t>Teach from docs/phases/05 and docs/ai-program.\n\n[Sources]\n- marketing/lesson-plans/phase-05.md\n[/Sources]</a:t>
             </a:r>
           </a:p>
         </p:txBody>
@@ -686,7 +686,7 @@
           <a:lstStyle xmlns:a="http://schemas.openxmlformats.org/drawingml/2006/main"/>
           <a:p xmlns:a="http://schemas.openxmlformats.org/drawingml/2006/main">
             <a:r>
-              <a:t>Teach from docs/phases/05 and docs/ai-program/skills.\n\n[Sources]\n- marketing/lesson-plans/phase-05.md\n[/Sources]</a:t>
+              <a:t>Teach from docs/phases/05 and docs/ai-program.\n\n[Sources]\n- marketing/lesson-plans/phase-05.md\n[/Sources]</a:t>
             </a:r>
           </a:p>
         </p:txBody>
@@ -756,7 +756,7 @@
           <a:lstStyle xmlns:a="http://schemas.openxmlformats.org/drawingml/2006/main"/>
           <a:p xmlns:a="http://schemas.openxmlformats.org/drawingml/2006/main">
             <a:r>
-              <a:t>Teach from docs/phases/05 and docs/ai-program/skills.\n\n[Sources]\n- marketing/lesson-plans/phase-05.md\n[/Sources]</a:t>
+              <a:t>Teach from docs/phases/05 and docs/ai-program.\n\n[Sources]\n- marketing/lesson-plans/phase-05.md\n[/Sources]</a:t>
             </a:r>
           </a:p>
         </p:txBody>
@@ -826,7 +826,7 @@
           <a:lstStyle xmlns:a="http://schemas.openxmlformats.org/drawingml/2006/main"/>
           <a:p xmlns:a="http://schemas.openxmlformats.org/drawingml/2006/main">
             <a:r>
-              <a:t>Teach from docs/phases/05 and docs/ai-program/skills.\n\n[Sources]\n- marketing/lesson-plans/phase-05.md\n[/Sources]</a:t>
+              <a:t>Teach from docs/phases/05 and docs/ai-program.\n\n[Sources]\n- marketing/lesson-plans/phase-05.md\n[/Sources]</a:t>
             </a:r>
           </a:p>
         </p:txBody>
@@ -896,7 +896,7 @@
           <a:lstStyle xmlns:a="http://schemas.openxmlformats.org/drawingml/2006/main"/>
           <a:p xmlns:a="http://schemas.openxmlformats.org/drawingml/2006/main">
             <a:r>
-              <a:t>Teach from docs/phases/05 and docs/ai-program/skills.\n\n[Sources]\n- marketing/lesson-plans/phase-05.md\n[/Sources]</a:t>
+              <a:t>Teach from docs/phases/05 and docs/ai-program.\n\n[Sources]\n- marketing/lesson-plans/phase-05.md\n[/Sources]</a:t>
             </a:r>
           </a:p>
         </p:txBody>
@@ -966,7 +966,7 @@
           <a:lstStyle xmlns:a="http://schemas.openxmlformats.org/drawingml/2006/main"/>
           <a:p xmlns:a="http://schemas.openxmlformats.org/drawingml/2006/main">
             <a:r>
-              <a:t>Teach from docs/phases/05 and docs/ai-program/skills.\n\n[Sources]\n- marketing/lesson-plans/phase-05.md\n[/Sources]</a:t>
+              <a:t>Teach from docs/phases/05 and docs/ai-program.\n\n[Sources]\n- marketing/lesson-plans/phase-05.md\n[/Sources]</a:t>
             </a:r>
           </a:p>
         </p:txBody>
@@ -1036,7 +1036,7 @@
           <a:lstStyle xmlns:a="http://schemas.openxmlformats.org/drawingml/2006/main"/>
           <a:p xmlns:a="http://schemas.openxmlformats.org/drawingml/2006/main">
             <a:r>
-              <a:t>Teach from docs/phases/05 and docs/ai-program/skills.\n\n[Sources]\n- marketing/lesson-plans/phase-05.md\n[/Sources]</a:t>
+              <a:t>Teach from docs/phases/05 and docs/ai-program.\n\n[Sources]\n- marketing/lesson-plans/phase-05.md\n[/Sources]</a:t>
             </a:r>
           </a:p>
         </p:txBody>
@@ -1106,7 +1106,7 @@
           <a:lstStyle xmlns:a="http://schemas.openxmlformats.org/drawingml/2006/main"/>
           <a:p xmlns:a="http://schemas.openxmlformats.org/drawingml/2006/main">
             <a:r>
-              <a:t>Teach from docs/phases/05 and docs/ai-program/skills.\n\n[Sources]\n- marketing/lesson-plans/phase-05.md\n[/Sources]</a:t>
+              <a:t>Teach from docs/phases/05 and docs/ai-program.\n\n[Sources]\n- marketing/lesson-plans/phase-05.md\n[/Sources]</a:t>
             </a:r>
           </a:p>
         </p:txBody>
@@ -1176,7 +1176,7 @@
           <a:lstStyle xmlns:a="http://schemas.openxmlformats.org/drawingml/2006/main"/>
           <a:p xmlns:a="http://schemas.openxmlformats.org/drawingml/2006/main">
             <a:r>
-              <a:t>Teach from docs/phases/05 and docs/ai-program/skills.\n\n[Sources]\n- marketing/lesson-plans/phase-05.md\n[/Sources]</a:t>
+              <a:t>Teach from docs/phases/05 and docs/ai-program.\n\n[Sources]\n- marketing/lesson-plans/phase-05.md\n[/Sources]</a:t>
             </a:r>
           </a:p>
         </p:txBody>
@@ -1246,7 +1246,7 @@
           <a:lstStyle xmlns:a="http://schemas.openxmlformats.org/drawingml/2006/main"/>
           <a:p xmlns:a="http://schemas.openxmlformats.org/drawingml/2006/main">
             <a:r>
-              <a:t>Teach from docs/phases/05 and docs/ai-program/skills.\n\n[Sources]\n- marketing/lesson-plans/phase-05.md\n[/Sources]</a:t>
+              <a:t>Teach from docs/phases/05 and docs/ai-program.\n\n[Sources]\n- marketing/lesson-plans/phase-05.md\n[/Sources]</a:t>
             </a:r>
           </a:p>
         </p:txBody>
@@ -4202,17 +4202,17 @@
   </p:cSld>
   <p:clrMap bg1="lt1" tx1="dk1" bg2="lt2" tx2="dk2" accent1="accent1" accent2="accent2" accent3="accent3" accent4="accent4" accent5="accent5" accent6="accent6" hlink="hlink" folHlink="folHlink"/>
   <p:sldLayoutIdLst>
-    <p:sldLayoutId xmlns:r="http://schemas.openxmlformats.org/officeDocument/2006/relationships" id="2147483649" r:id="R13bff7d50eae410b"/>
-    <p:sldLayoutId xmlns:r="http://schemas.openxmlformats.org/officeDocument/2006/relationships" id="2147483650" r:id="R63e38e908f514654"/>
-    <p:sldLayoutId xmlns:r="http://schemas.openxmlformats.org/officeDocument/2006/relationships" id="2147483651" r:id="R79472ded72b14fde"/>
-    <p:sldLayoutId xmlns:r="http://schemas.openxmlformats.org/officeDocument/2006/relationships" id="2147483652" r:id="R96d3fa88cad142b7"/>
-    <p:sldLayoutId xmlns:r="http://schemas.openxmlformats.org/officeDocument/2006/relationships" id="2147483653" r:id="Rec38db0b4d5e4068"/>
-    <p:sldLayoutId xmlns:r="http://schemas.openxmlformats.org/officeDocument/2006/relationships" id="2147483654" r:id="R35564e773c684cd3"/>
-    <p:sldLayoutId xmlns:r="http://schemas.openxmlformats.org/officeDocument/2006/relationships" id="2147483655" r:id="Ra4dda1379df24113"/>
-    <p:sldLayoutId xmlns:r="http://schemas.openxmlformats.org/officeDocument/2006/relationships" id="2147483656" r:id="R3bc3ad1b7a1041c5"/>
-    <p:sldLayoutId xmlns:r="http://schemas.openxmlformats.org/officeDocument/2006/relationships" id="2147483657" r:id="Rc092e0d35da1497d"/>
-    <p:sldLayoutId xmlns:r="http://schemas.openxmlformats.org/officeDocument/2006/relationships" id="2147483658" r:id="R0b674b6f17154e17"/>
-    <p:sldLayoutId xmlns:r="http://schemas.openxmlformats.org/officeDocument/2006/relationships" id="2147483659" r:id="R5122c6790875479b"/>
+    <p:sldLayoutId xmlns:r="http://schemas.openxmlformats.org/officeDocument/2006/relationships" id="2147483649" r:id="Ra0bdd7d36ec24a96"/>
+    <p:sldLayoutId xmlns:r="http://schemas.openxmlformats.org/officeDocument/2006/relationships" id="2147483650" r:id="Raeffa9f30e94424a"/>
+    <p:sldLayoutId xmlns:r="http://schemas.openxmlformats.org/officeDocument/2006/relationships" id="2147483651" r:id="R346dee94a44f4b7d"/>
+    <p:sldLayoutId xmlns:r="http://schemas.openxmlformats.org/officeDocument/2006/relationships" id="2147483652" r:id="R2686f4179f7546b7"/>
+    <p:sldLayoutId xmlns:r="http://schemas.openxmlformats.org/officeDocument/2006/relationships" id="2147483653" r:id="Racbbf1d868824052"/>
+    <p:sldLayoutId xmlns:r="http://schemas.openxmlformats.org/officeDocument/2006/relationships" id="2147483654" r:id="R1f9018afc81a407b"/>
+    <p:sldLayoutId xmlns:r="http://schemas.openxmlformats.org/officeDocument/2006/relationships" id="2147483655" r:id="Rade6570ee3594687"/>
+    <p:sldLayoutId xmlns:r="http://schemas.openxmlformats.org/officeDocument/2006/relationships" id="2147483656" r:id="R977482f8ff2c45f9"/>
+    <p:sldLayoutId xmlns:r="http://schemas.openxmlformats.org/officeDocument/2006/relationships" id="2147483657" r:id="Rff29f638e21540d8"/>
+    <p:sldLayoutId xmlns:r="http://schemas.openxmlformats.org/officeDocument/2006/relationships" id="2147483658" r:id="R607259c5ed084667"/>
+    <p:sldLayoutId xmlns:r="http://schemas.openxmlformats.org/officeDocument/2006/relationships" id="2147483659" r:id="Re6600dca962b4911"/>
   </p:sldLayoutIdLst>
   <p:txStyles>
     <p:titleStyle>
@@ -4795,7 +4795,7 @@
                 <a:ea typeface="Calibri Light"/>
                 <a:cs typeface="Calibri Light"/>
               </a:rPr>
-              <a:t>Scout the Skills</a:t>
+              <a:t>Scout Capabilities</a:t>
             </a:r>
           </a:p>
         </p:txBody>
@@ -4889,7 +4889,7 @@
                 <a:ea typeface="Calibri"/>
                 <a:cs typeface="Calibri"/>
               </a:rPr>
-              <a:t>Phase 05 skills locator</a:t>
+              <a:t>Phase 05 capability locator</a:t>
             </a:r>
           </a:p>
         </p:txBody>
@@ -5681,7 +5681,7 @@
                 <a:ea typeface="Calibri"/>
                 <a:cs typeface="Calibri"/>
               </a:rPr>
-              <a:t>PHASE 05 SKILLS</a:t>
+              <a:t>PHASE 05 CAPABILITIES</a:t>
             </a:r>
           </a:p>
         </p:txBody>
@@ -6112,7 +6112,7 @@
                 <a:ea typeface="Calibri"/>
                 <a:cs typeface="Calibri"/>
               </a:rPr>
-              <a:t>full folder preview</a:t>
+              <a:t>full package preview</a:t>
             </a:r>
           </a:p>
         </p:txBody>
@@ -6800,7 +6800,7 @@
                 <a:ea typeface="Calibri Light"/>
                 <a:cs typeface="Calibri Light"/>
               </a:rPr>
-              <a:t>Find More Skills</a:t>
+              <a:t>Scout More Capabilities</a:t>
             </a:r>
           </a:p>
         </p:txBody>
@@ -7100,7 +7100,7 @@
                 <a:ea typeface="Calibri"/>
                 <a:cs typeface="Calibri"/>
               </a:rPr>
-              <a:t>PHASE 05 SKILLS</a:t>
+              <a:t>PHASE 05 CAPABILITIES</a:t>
             </a:r>
           </a:p>
         </p:txBody>
@@ -7633,7 +7633,7 @@
                 <a:ea typeface="Calibri"/>
                 <a:cs typeface="Calibri"/>
               </a:rPr>
-              <a:t>Not a skill</a:t>
+              <a:t>Agent / rule / tool</a:t>
             </a:r>
           </a:p>
         </p:txBody>
@@ -7915,7 +7915,7 @@
                 <a:ea typeface="Calibri"/>
                 <a:cs typeface="Calibri"/>
               </a:rPr>
-              <a:t>tool = capability</a:t>
+              <a:t>tool = external capability</a:t>
             </a:r>
           </a:p>
         </p:txBody>
@@ -8078,7 +8078,7 @@
                 <a:ea typeface="Calibri"/>
                 <a:cs typeface="Calibri"/>
               </a:rPr>
-              <a:t>PHASE 05 SKILLS</a:t>
+              <a:t>PHASE 05 CAPABILITIES</a:t>
             </a:r>
           </a:p>
         </p:txBody>
@@ -9253,7 +9253,7 @@
                 <a:ea typeface="Calibri"/>
                 <a:cs typeface="Calibri"/>
               </a:rPr>
-              <a:t>PHASE 05 SKILLS</a:t>
+              <a:t>PHASE 05 CAPABILITIES</a:t>
             </a:r>
           </a:p>
         </p:txBody>
@@ -9792,7 +9792,7 @@
                 <a:ea typeface="Calibri"/>
                 <a:cs typeface="Calibri"/>
               </a:rPr>
-              <a:t>PHASE 05 SKILLS</a:t>
+              <a:t>PHASE 05 CAPABILITIES</a:t>
             </a:r>
           </a:p>
         </p:txBody>
@@ -10129,7 +10129,7 @@
                 <a:ea typeface="Calibri"/>
                 <a:cs typeface="Calibri"/>
               </a:rPr>
-              <a:t>category + maturity</a:t>
+              <a:t>function + maturity</a:t>
             </a:r>
           </a:p>
         </p:txBody>
@@ -10723,7 +10723,7 @@
                 <a:ea typeface="Calibri"/>
                 <a:cs typeface="Calibri"/>
               </a:rPr>
-              <a:t>PHASE 05 SKILLS</a:t>
+              <a:t>PHASE 05 CAPABILITIES</a:t>
             </a:r>
           </a:p>
         </p:txBody>
@@ -11060,7 +11060,7 @@
                 <a:ea typeface="Calibri"/>
                 <a:cs typeface="Calibri"/>
               </a:rPr>
-              <a:t>capability or preference</a:t>
+              <a:t>kind + intended function</a:t>
             </a:r>
           </a:p>
         </p:txBody>
@@ -11842,7 +11842,7 @@
                 <a:ea typeface="Calibri"/>
                 <a:cs typeface="Calibri"/>
               </a:rPr>
-              <a:t>PHASE 05 SKILLS</a:t>
+              <a:t>PHASE 05 CAPABILITIES</a:t>
             </a:r>
           </a:p>
         </p:txBody>
@@ -11889,7 +11889,7 @@
                 <a:ea typeface="Calibri Light"/>
                 <a:cs typeface="Calibri Light"/>
               </a:rPr>
-              <a:t>Skills need tests too</a:t>
+              <a:t>Skills and agents need tests</a:t>
             </a:r>
           </a:p>
         </p:txBody>
@@ -12499,7 +12499,7 @@
                 <a:ea typeface="Calibri"/>
                 <a:cs typeface="Calibri"/>
               </a:rPr>
-              <a:t>PHASE 05 SKILLS</a:t>
+              <a:t>PHASE 05 CAPABILITIES</a:t>
             </a:r>
           </a:p>
         </p:txBody>
@@ -13558,7 +13558,7 @@
                 <a:ea typeface="Calibri Light"/>
                 <a:cs typeface="Calibri Light"/>
               </a:rPr>
-              <a:t>Instruction-only skills can still be dangerous.</a:t>
+              <a:t>Instructions can still be dangerous.</a:t>
             </a:r>
           </a:p>
         </p:txBody>
@@ -13674,7 +13674,7 @@
                 <a:ea typeface="Calibri"/>
                 <a:cs typeface="Calibri"/>
               </a:rPr>
-              <a:t>PHASE 05 SKILLS</a:t>
+              <a:t>PHASE 05 CAPABILITIES</a:t>
             </a:r>
           </a:p>
         </p:txBody>

--- a/marketing/decks/phase-05-skill-scouting.pptx
+++ b/marketing/decks/phase-05-skill-scouting.pptx
@@ -2,24 +2,24 @@
 <file path=ppt/presentation.xml><?xml version="1.0" encoding="utf-8"?>
 <p:presentation xmlns:p="http://schemas.openxmlformats.org/presentationml/2006/main">
   <p:sldMasterIdLst>
-    <p:sldMasterId xmlns:r="http://schemas.openxmlformats.org/officeDocument/2006/relationships" id="2147483648" r:id="Rab97a48f5f654dd9"/>
+    <p:sldMasterId xmlns:r="http://schemas.openxmlformats.org/officeDocument/2006/relationships" id="2147483648" r:id="R9d0e953de0be4535"/>
   </p:sldMasterIdLst>
   <p:notesMasterIdLst>
-    <p:notesMasterId xmlns:r="http://schemas.openxmlformats.org/officeDocument/2006/relationships" r:id="R71c770d8e7bc4537"/>
+    <p:notesMasterId xmlns:r="http://schemas.openxmlformats.org/officeDocument/2006/relationships" r:id="R5824f0574a414cf8"/>
   </p:notesMasterIdLst>
   <p:sldIdLst>
-    <p:sldId xmlns:r="http://schemas.openxmlformats.org/officeDocument/2006/relationships" id="256" r:id="R8ee163daeffd400b"/>
-    <p:sldId xmlns:r="http://schemas.openxmlformats.org/officeDocument/2006/relationships" id="257" r:id="R3320ec1cbc2d44e2"/>
-    <p:sldId xmlns:r="http://schemas.openxmlformats.org/officeDocument/2006/relationships" id="258" r:id="R5969d51d083d4b15"/>
-    <p:sldId xmlns:r="http://schemas.openxmlformats.org/officeDocument/2006/relationships" id="259" r:id="R5a32ba7816534734"/>
-    <p:sldId xmlns:r="http://schemas.openxmlformats.org/officeDocument/2006/relationships" id="260" r:id="R39ca8ecdc28b4c0a"/>
-    <p:sldId xmlns:r="http://schemas.openxmlformats.org/officeDocument/2006/relationships" id="261" r:id="R6090f6b9a4ab4722"/>
-    <p:sldId xmlns:r="http://schemas.openxmlformats.org/officeDocument/2006/relationships" id="262" r:id="Rbc967b4cfcd94270"/>
-    <p:sldId xmlns:r="http://schemas.openxmlformats.org/officeDocument/2006/relationships" id="263" r:id="R148923668b4e404f"/>
-    <p:sldId xmlns:r="http://schemas.openxmlformats.org/officeDocument/2006/relationships" id="264" r:id="R840952fd78c64c13"/>
-    <p:sldId xmlns:r="http://schemas.openxmlformats.org/officeDocument/2006/relationships" id="265" r:id="Rc81404bd895e46a1"/>
-    <p:sldId xmlns:r="http://schemas.openxmlformats.org/officeDocument/2006/relationships" id="266" r:id="Re6372310cf1e48e2"/>
-    <p:sldId xmlns:r="http://schemas.openxmlformats.org/officeDocument/2006/relationships" id="267" r:id="R760cabcc30154e61"/>
+    <p:sldId xmlns:r="http://schemas.openxmlformats.org/officeDocument/2006/relationships" id="256" r:id="R68c8db79302f4a28"/>
+    <p:sldId xmlns:r="http://schemas.openxmlformats.org/officeDocument/2006/relationships" id="257" r:id="Rde743f9f8450445d"/>
+    <p:sldId xmlns:r="http://schemas.openxmlformats.org/officeDocument/2006/relationships" id="258" r:id="R39fcb1ea1abe4ead"/>
+    <p:sldId xmlns:r="http://schemas.openxmlformats.org/officeDocument/2006/relationships" id="259" r:id="Rf82a0bdb10024faf"/>
+    <p:sldId xmlns:r="http://schemas.openxmlformats.org/officeDocument/2006/relationships" id="260" r:id="Rf713e9a9781b4845"/>
+    <p:sldId xmlns:r="http://schemas.openxmlformats.org/officeDocument/2006/relationships" id="261" r:id="Rf060f58b854c451b"/>
+    <p:sldId xmlns:r="http://schemas.openxmlformats.org/officeDocument/2006/relationships" id="262" r:id="Rbe855c566cb64ffa"/>
+    <p:sldId xmlns:r="http://schemas.openxmlformats.org/officeDocument/2006/relationships" id="263" r:id="Rcccf7f7ac1744b70"/>
+    <p:sldId xmlns:r="http://schemas.openxmlformats.org/officeDocument/2006/relationships" id="264" r:id="Re76bd76523bc4398"/>
+    <p:sldId xmlns:r="http://schemas.openxmlformats.org/officeDocument/2006/relationships" id="265" r:id="Rb1b48e741d7340e1"/>
+    <p:sldId xmlns:r="http://schemas.openxmlformats.org/officeDocument/2006/relationships" id="266" r:id="R3aaa9f9db10841e8"/>
+    <p:sldId xmlns:r="http://schemas.openxmlformats.org/officeDocument/2006/relationships" id="267" r:id="R61a678c0f971471b"/>
   </p:sldIdLst>
   <p:sldSz cx="12192000" cy="6858000"/>
   <p:notesSz cx="6858000" cy="9144000"/>
@@ -4202,17 +4202,17 @@
   </p:cSld>
   <p:clrMap bg1="lt1" tx1="dk1" bg2="lt2" tx2="dk2" accent1="accent1" accent2="accent2" accent3="accent3" accent4="accent4" accent5="accent5" accent6="accent6" hlink="hlink" folHlink="folHlink"/>
   <p:sldLayoutIdLst>
-    <p:sldLayoutId xmlns:r="http://schemas.openxmlformats.org/officeDocument/2006/relationships" id="2147483649" r:id="Ra0bdd7d36ec24a96"/>
-    <p:sldLayoutId xmlns:r="http://schemas.openxmlformats.org/officeDocument/2006/relationships" id="2147483650" r:id="Raeffa9f30e94424a"/>
-    <p:sldLayoutId xmlns:r="http://schemas.openxmlformats.org/officeDocument/2006/relationships" id="2147483651" r:id="R346dee94a44f4b7d"/>
-    <p:sldLayoutId xmlns:r="http://schemas.openxmlformats.org/officeDocument/2006/relationships" id="2147483652" r:id="R2686f4179f7546b7"/>
-    <p:sldLayoutId xmlns:r="http://schemas.openxmlformats.org/officeDocument/2006/relationships" id="2147483653" r:id="Racbbf1d868824052"/>
-    <p:sldLayoutId xmlns:r="http://schemas.openxmlformats.org/officeDocument/2006/relationships" id="2147483654" r:id="R1f9018afc81a407b"/>
-    <p:sldLayoutId xmlns:r="http://schemas.openxmlformats.org/officeDocument/2006/relationships" id="2147483655" r:id="Rade6570ee3594687"/>
-    <p:sldLayoutId xmlns:r="http://schemas.openxmlformats.org/officeDocument/2006/relationships" id="2147483656" r:id="R977482f8ff2c45f9"/>
-    <p:sldLayoutId xmlns:r="http://schemas.openxmlformats.org/officeDocument/2006/relationships" id="2147483657" r:id="Rff29f638e21540d8"/>
-    <p:sldLayoutId xmlns:r="http://schemas.openxmlformats.org/officeDocument/2006/relationships" id="2147483658" r:id="R607259c5ed084667"/>
-    <p:sldLayoutId xmlns:r="http://schemas.openxmlformats.org/officeDocument/2006/relationships" id="2147483659" r:id="Re6600dca962b4911"/>
+    <p:sldLayoutId xmlns:r="http://schemas.openxmlformats.org/officeDocument/2006/relationships" id="2147483649" r:id="R22303e8d79bd4e39"/>
+    <p:sldLayoutId xmlns:r="http://schemas.openxmlformats.org/officeDocument/2006/relationships" id="2147483650" r:id="Redfd340433d84507"/>
+    <p:sldLayoutId xmlns:r="http://schemas.openxmlformats.org/officeDocument/2006/relationships" id="2147483651" r:id="Rf9362f8b47244bbb"/>
+    <p:sldLayoutId xmlns:r="http://schemas.openxmlformats.org/officeDocument/2006/relationships" id="2147483652" r:id="R630f6c17727d4754"/>
+    <p:sldLayoutId xmlns:r="http://schemas.openxmlformats.org/officeDocument/2006/relationships" id="2147483653" r:id="R9f0276084bc94b68"/>
+    <p:sldLayoutId xmlns:r="http://schemas.openxmlformats.org/officeDocument/2006/relationships" id="2147483654" r:id="Rb3d4b639015d4c19"/>
+    <p:sldLayoutId xmlns:r="http://schemas.openxmlformats.org/officeDocument/2006/relationships" id="2147483655" r:id="Rdc20dca15d354bda"/>
+    <p:sldLayoutId xmlns:r="http://schemas.openxmlformats.org/officeDocument/2006/relationships" id="2147483656" r:id="R62987499cf1945a3"/>
+    <p:sldLayoutId xmlns:r="http://schemas.openxmlformats.org/officeDocument/2006/relationships" id="2147483657" r:id="R4a5458125901490c"/>
+    <p:sldLayoutId xmlns:r="http://schemas.openxmlformats.org/officeDocument/2006/relationships" id="2147483658" r:id="R291b6a693944411b"/>
+    <p:sldLayoutId xmlns:r="http://schemas.openxmlformats.org/officeDocument/2006/relationships" id="2147483659" r:id="Recda1977f4c2463d"/>
   </p:sldLayoutIdLst>
   <p:txStyles>
     <p:titleStyle>
@@ -6789,10 +6789,14 @@
           <a:lstStyle xmlns:a="http://schemas.openxmlformats.org/drawingml/2006/main"/>
           <a:p xmlns:a="http://schemas.openxmlformats.org/drawingml/2006/main">
             <a:pPr algn="l">
-              <a:buNone/>
-            </a:pPr>
-            <a:r>
-              <a:rPr sz="4350" b="1">
+              <a:lnSpc>
+                <a:spcPct val="98000"/>
+              </a:lnSpc>
+              <a:buNone/>
+              <a:defRPr sz="3525" b="1"/>
+            </a:pPr>
+            <a:r>
+              <a:rPr sz="3525" b="1">
                 <a:solidFill>
                   <a:srgbClr val="000000"/>
                 </a:solidFill>
@@ -6836,10 +6840,14 @@
           <a:lstStyle xmlns:a="http://schemas.openxmlformats.org/drawingml/2006/main"/>
           <a:p xmlns:a="http://schemas.openxmlformats.org/drawingml/2006/main">
             <a:pPr algn="l">
-              <a:buNone/>
-            </a:pPr>
-            <a:r>
-              <a:rPr sz="4350" b="1">
+              <a:lnSpc>
+                <a:spcPct val="98000"/>
+              </a:lnSpc>
+              <a:buNone/>
+              <a:defRPr sz="3525" b="1"/>
+            </a:pPr>
+            <a:r>
+              <a:rPr sz="3525" b="1">
                 <a:solidFill>
                   <a:srgbClr val="000000"/>
                 </a:solidFill>
@@ -6883,10 +6891,14 @@
           <a:lstStyle xmlns:a="http://schemas.openxmlformats.org/drawingml/2006/main"/>
           <a:p xmlns:a="http://schemas.openxmlformats.org/drawingml/2006/main">
             <a:pPr algn="l">
-              <a:buNone/>
-            </a:pPr>
-            <a:r>
-              <a:rPr sz="1875" b="0">
+              <a:lnSpc>
+                <a:spcPct val="108000"/>
+              </a:lnSpc>
+              <a:buNone/>
+              <a:defRPr sz="1725" b="1"/>
+            </a:pPr>
+            <a:r>
+              <a:rPr sz="1725" b="1">
                 <a:solidFill>
                   <a:srgbClr val="60646C"/>
                 </a:solidFill>
@@ -6973,7 +6985,11 @@
           <a:lstStyle xmlns:a="http://schemas.openxmlformats.org/drawingml/2006/main"/>
           <a:p xmlns:a="http://schemas.openxmlformats.org/drawingml/2006/main">
             <a:pPr algn="l">
-              <a:buNone/>
+              <a:lnSpc>
+                <a:spcPct val="100000"/>
+              </a:lnSpc>
+              <a:buNone/>
+              <a:defRPr sz="2175"/>
             </a:pPr>
             <a:r>
               <a:rPr sz="2175" b="0">
@@ -6984,7 +7000,18 @@
                 <a:ea typeface="Calibri"/>
                 <a:cs typeface="Calibri"/>
               </a:rPr>
-              <a:t>Phase 05.5 turns the locator into a persistent organizational registry.</a:t>
+              <a:t>Phase 05 Part B</a:t>
+            </a:r>
+            <a:r>
+              <a:rPr sz="2175" b="0">
+                <a:solidFill>
+                  <a:srgbClr val="000000"/>
+                </a:solidFill>
+                <a:latin typeface="Calibri"/>
+                <a:ea typeface="Calibri"/>
+                <a:cs typeface="Calibri"/>
+              </a:rPr>
+              <a:t> turns the locator into a persistent organizational registry.</a:t>
             </a:r>
           </a:p>
         </p:txBody>
@@ -8114,10 +8141,14 @@
           <a:lstStyle xmlns:a="http://schemas.openxmlformats.org/drawingml/2006/main"/>
           <a:p xmlns:a="http://schemas.openxmlformats.org/drawingml/2006/main">
             <a:pPr algn="l">
-              <a:buNone/>
-            </a:pPr>
-            <a:r>
-              <a:rPr sz="3750" b="1">
+              <a:lnSpc>
+                <a:spcPct val="98000"/>
+              </a:lnSpc>
+              <a:buNone/>
+              <a:defRPr sz="3525" b="1"/>
+            </a:pPr>
+            <a:r>
+              <a:rPr sz="3525" b="1">
                 <a:solidFill>
                   <a:srgbClr val="000000"/>
                 </a:solidFill>
@@ -8146,7 +8177,7 @@
         </p:nvSpPr>
         <p:spPr>
           <a:xfrm xmlns:a="http://schemas.openxmlformats.org/drawingml/2006/main">
-            <a:off x="-76200" y="3314700"/>
+            <a:off x="114300" y="3314700"/>
             <a:ext cx="1981200" cy="1504950"/>
           </a:xfrm>
           <a:prstGeom xmlns:a="http://schemas.openxmlformats.org/drawingml/2006/main" prst="rect">
@@ -8201,7 +8232,7 @@
         </p:nvSpPr>
         <p:spPr>
           <a:xfrm xmlns:a="http://schemas.openxmlformats.org/drawingml/2006/main">
-            <a:off x="19050" y="3694700"/>
+            <a:off x="209550" y="3694700"/>
             <a:ext cx="1790700" cy="400050"/>
           </a:xfrm>
           <a:prstGeom xmlns:a="http://schemas.openxmlformats.org/drawingml/2006/main" prst="rect">
@@ -8216,10 +8247,14 @@
           <a:lstStyle xmlns:a="http://schemas.openxmlformats.org/drawingml/2006/main"/>
           <a:p xmlns:a="http://schemas.openxmlformats.org/drawingml/2006/main">
             <a:pPr algn="ctr">
-              <a:buNone/>
-            </a:pPr>
-            <a:r>
-              <a:rPr sz="2000" b="1">
+              <a:lnSpc>
+                <a:spcPct val="108000"/>
+              </a:lnSpc>
+              <a:buNone/>
+              <a:defRPr sz="1725" b="1"/>
+            </a:pPr>
+            <a:r>
+              <a:rPr sz="1725" b="1">
                 <a:solidFill>
                   <a:srgbClr val="000000"/>
                 </a:solidFill>
@@ -8248,7 +8283,7 @@
         </p:nvSpPr>
         <p:spPr>
           <a:xfrm xmlns:a="http://schemas.openxmlformats.org/drawingml/2006/main">
-            <a:off x="19050" y="4114800"/>
+            <a:off x="209550" y="4114800"/>
             <a:ext cx="1790700" cy="500000"/>
           </a:xfrm>
           <a:prstGeom xmlns:a="http://schemas.openxmlformats.org/drawingml/2006/main" prst="rect">
@@ -8263,7 +8298,11 @@
           <a:lstStyle xmlns:a="http://schemas.openxmlformats.org/drawingml/2006/main"/>
           <a:p xmlns:a="http://schemas.openxmlformats.org/drawingml/2006/main">
             <a:pPr algn="ctr">
-              <a:buNone/>
+              <a:lnSpc>
+                <a:spcPct val="108000"/>
+              </a:lnSpc>
+              <a:buNone/>
+              <a:defRPr sz="1350" b="0"/>
             </a:pPr>
             <a:r>
               <a:rPr sz="1350" b="0">
@@ -8420,10 +8459,14 @@
           <a:lstStyle xmlns:a="http://schemas.openxmlformats.org/drawingml/2006/main"/>
           <a:p xmlns:a="http://schemas.openxmlformats.org/drawingml/2006/main">
             <a:pPr algn="ctr">
-              <a:buNone/>
-            </a:pPr>
-            <a:r>
-              <a:rPr sz="2000" b="1">
+              <a:lnSpc>
+                <a:spcPct val="108000"/>
+              </a:lnSpc>
+              <a:buNone/>
+              <a:defRPr sz="1725" b="1"/>
+            </a:pPr>
+            <a:r>
+              <a:rPr sz="1725" b="1">
                 <a:solidFill>
                   <a:srgbClr val="000000"/>
                 </a:solidFill>
@@ -8467,7 +8510,11 @@
           <a:lstStyle xmlns:a="http://schemas.openxmlformats.org/drawingml/2006/main"/>
           <a:p xmlns:a="http://schemas.openxmlformats.org/drawingml/2006/main">
             <a:pPr algn="ctr">
-              <a:buNone/>
+              <a:lnSpc>
+                <a:spcPct val="108000"/>
+              </a:lnSpc>
+              <a:buNone/>
+              <a:defRPr sz="1350" b="0"/>
             </a:pPr>
             <a:r>
               <a:rPr sz="1350" b="0">
@@ -8624,10 +8671,14 @@
           <a:lstStyle xmlns:a="http://schemas.openxmlformats.org/drawingml/2006/main"/>
           <a:p xmlns:a="http://schemas.openxmlformats.org/drawingml/2006/main">
             <a:pPr algn="ctr">
-              <a:buNone/>
-            </a:pPr>
-            <a:r>
-              <a:rPr sz="2000" b="1">
+              <a:lnSpc>
+                <a:spcPct val="108000"/>
+              </a:lnSpc>
+              <a:buNone/>
+              <a:defRPr sz="1725" b="1"/>
+            </a:pPr>
+            <a:r>
+              <a:rPr sz="1725" b="1">
                 <a:solidFill>
                   <a:srgbClr val="000000"/>
                 </a:solidFill>
@@ -8671,7 +8722,11 @@
           <a:lstStyle xmlns:a="http://schemas.openxmlformats.org/drawingml/2006/main"/>
           <a:p xmlns:a="http://schemas.openxmlformats.org/drawingml/2006/main">
             <a:pPr algn="ctr">
-              <a:buNone/>
+              <a:lnSpc>
+                <a:spcPct val="108000"/>
+              </a:lnSpc>
+              <a:buNone/>
+              <a:defRPr sz="1350" b="0"/>
             </a:pPr>
             <a:r>
               <a:rPr sz="1350" b="0">
@@ -8828,10 +8883,14 @@
           <a:lstStyle xmlns:a="http://schemas.openxmlformats.org/drawingml/2006/main"/>
           <a:p xmlns:a="http://schemas.openxmlformats.org/drawingml/2006/main">
             <a:pPr algn="ctr">
-              <a:buNone/>
-            </a:pPr>
-            <a:r>
-              <a:rPr sz="2000" b="1">
+              <a:lnSpc>
+                <a:spcPct val="108000"/>
+              </a:lnSpc>
+              <a:buNone/>
+              <a:defRPr sz="1725" b="1"/>
+            </a:pPr>
+            <a:r>
+              <a:rPr sz="1725" b="1">
                 <a:solidFill>
                   <a:srgbClr val="000000"/>
                 </a:solidFill>
@@ -8875,7 +8934,11 @@
           <a:lstStyle xmlns:a="http://schemas.openxmlformats.org/drawingml/2006/main"/>
           <a:p xmlns:a="http://schemas.openxmlformats.org/drawingml/2006/main">
             <a:pPr algn="ctr">
-              <a:buNone/>
+              <a:lnSpc>
+                <a:spcPct val="108000"/>
+              </a:lnSpc>
+              <a:buNone/>
+              <a:defRPr sz="1350" b="0"/>
             </a:pPr>
             <a:r>
               <a:rPr sz="1350" b="0">
@@ -8962,7 +9025,7 @@
         </p:nvSpPr>
         <p:spPr>
           <a:xfrm xmlns:a="http://schemas.openxmlformats.org/drawingml/2006/main">
-            <a:off x="10287000" y="3314700"/>
+            <a:off x="10096500" y="3314700"/>
             <a:ext cx="1981200" cy="1504950"/>
           </a:xfrm>
           <a:prstGeom xmlns:a="http://schemas.openxmlformats.org/drawingml/2006/main" prst="rect">
@@ -9017,7 +9080,7 @@
         </p:nvSpPr>
         <p:spPr>
           <a:xfrm xmlns:a="http://schemas.openxmlformats.org/drawingml/2006/main">
-            <a:off x="10382250" y="3694700"/>
+            <a:off x="10191750" y="3694700"/>
             <a:ext cx="1790700" cy="400050"/>
           </a:xfrm>
           <a:prstGeom xmlns:a="http://schemas.openxmlformats.org/drawingml/2006/main" prst="rect">
@@ -9032,10 +9095,14 @@
           <a:lstStyle xmlns:a="http://schemas.openxmlformats.org/drawingml/2006/main"/>
           <a:p xmlns:a="http://schemas.openxmlformats.org/drawingml/2006/main">
             <a:pPr algn="ctr">
-              <a:buNone/>
-            </a:pPr>
-            <a:r>
-              <a:rPr sz="2000" b="1">
+              <a:lnSpc>
+                <a:spcPct val="108000"/>
+              </a:lnSpc>
+              <a:buNone/>
+              <a:defRPr sz="1725" b="1"/>
+            </a:pPr>
+            <a:r>
+              <a:rPr sz="1725" b="1">
                 <a:solidFill>
                   <a:srgbClr val="000000"/>
                 </a:solidFill>
@@ -9064,7 +9131,7 @@
         </p:nvSpPr>
         <p:spPr>
           <a:xfrm xmlns:a="http://schemas.openxmlformats.org/drawingml/2006/main">
-            <a:off x="10382250" y="4114800"/>
+            <a:off x="10191750" y="4114800"/>
             <a:ext cx="1790700" cy="500000"/>
           </a:xfrm>
           <a:prstGeom xmlns:a="http://schemas.openxmlformats.org/drawingml/2006/main" prst="rect">
@@ -9079,7 +9146,11 @@
           <a:lstStyle xmlns:a="http://schemas.openxmlformats.org/drawingml/2006/main"/>
           <a:p xmlns:a="http://schemas.openxmlformats.org/drawingml/2006/main">
             <a:pPr algn="ctr">
-              <a:buNone/>
+              <a:lnSpc>
+                <a:spcPct val="108000"/>
+              </a:lnSpc>
+              <a:buNone/>
+              <a:defRPr sz="1350" b="0"/>
             </a:pPr>
             <a:r>
               <a:rPr sz="1350" b="0">
@@ -9111,8 +9182,8 @@
         </p:nvSpPr>
         <p:spPr>
           <a:xfrm xmlns:a="http://schemas.openxmlformats.org/drawingml/2006/main">
-            <a:off x="1676400" y="5181600"/>
-            <a:ext cx="8839200" cy="600075"/>
+            <a:off x="1676400" y="5448300"/>
+            <a:ext cx="8839200" cy="457200"/>
           </a:xfrm>
           <a:prstGeom xmlns:a="http://schemas.openxmlformats.org/drawingml/2006/main" prst="rect">
             <a:avLst/>
@@ -9126,10 +9197,14 @@
           <a:lstStyle xmlns:a="http://schemas.openxmlformats.org/drawingml/2006/main"/>
           <a:p xmlns:a="http://schemas.openxmlformats.org/drawingml/2006/main">
             <a:pPr algn="ctr">
-              <a:buNone/>
-            </a:pPr>
-            <a:r>
-              <a:rPr sz="2100" b="1">
+              <a:lnSpc>
+                <a:spcPct val="105000"/>
+              </a:lnSpc>
+              <a:buNone/>
+              <a:defRPr sz="1500"/>
+            </a:pPr>
+            <a:r>
+              <a:rPr sz="1500" b="1">
                 <a:solidFill>
                   <a:srgbClr val="000000"/>
                 </a:solidFill>
@@ -9289,10 +9364,14 @@
           <a:lstStyle xmlns:a="http://schemas.openxmlformats.org/drawingml/2006/main"/>
           <a:p xmlns:a="http://schemas.openxmlformats.org/drawingml/2006/main">
             <a:pPr algn="l">
-              <a:buNone/>
-            </a:pPr>
-            <a:r>
-              <a:rPr sz="3750" b="1">
+              <a:lnSpc>
+                <a:spcPct val="98000"/>
+              </a:lnSpc>
+              <a:buNone/>
+              <a:defRPr sz="3525" b="1"/>
+            </a:pPr>
+            <a:r>
+              <a:rPr sz="3525" b="1">
                 <a:solidFill>
                   <a:srgbClr val="000000"/>
                 </a:solidFill>
@@ -9336,10 +9415,14 @@
           <a:lstStyle xmlns:a="http://schemas.openxmlformats.org/drawingml/2006/main"/>
           <a:p xmlns:a="http://schemas.openxmlformats.org/drawingml/2006/main">
             <a:pPr algn="l">
-              <a:buNone/>
-            </a:pPr>
-            <a:r>
-              <a:rPr sz="2100" b="1">
+              <a:lnSpc>
+                <a:spcPct val="108000"/>
+              </a:lnSpc>
+              <a:buNone/>
+              <a:defRPr sz="1725" b="1"/>
+            </a:pPr>
+            <a:r>
+              <a:rPr sz="1725" b="1">
                 <a:solidFill>
                   <a:srgbClr val="000000"/>
                 </a:solidFill>
@@ -9430,10 +9513,14 @@
           <a:lstStyle xmlns:a="http://schemas.openxmlformats.org/drawingml/2006/main"/>
           <a:p xmlns:a="http://schemas.openxmlformats.org/drawingml/2006/main">
             <a:pPr algn="l">
-              <a:buNone/>
-            </a:pPr>
-            <a:r>
-              <a:rPr sz="2100" b="1">
+              <a:lnSpc>
+                <a:spcPct val="108000"/>
+              </a:lnSpc>
+              <a:buNone/>
+              <a:defRPr sz="1725" b="1"/>
+            </a:pPr>
+            <a:r>
+              <a:rPr sz="1725" b="1">
                 <a:solidFill>
                   <a:srgbClr val="000000"/>
                 </a:solidFill>
@@ -9524,10 +9611,14 @@
           <a:lstStyle xmlns:a="http://schemas.openxmlformats.org/drawingml/2006/main"/>
           <a:p xmlns:a="http://schemas.openxmlformats.org/drawingml/2006/main">
             <a:pPr algn="l">
-              <a:buNone/>
-            </a:pPr>
-            <a:r>
-              <a:rPr sz="2100" b="1">
+              <a:lnSpc>
+                <a:spcPct val="108000"/>
+              </a:lnSpc>
+              <a:buNone/>
+              <a:defRPr sz="1350" b="0"/>
+            </a:pPr>
+            <a:r>
+              <a:rPr sz="1350" b="0">
                 <a:solidFill>
                   <a:srgbClr val="000000"/>
                 </a:solidFill>
@@ -9571,10 +9662,14 @@
           <a:lstStyle xmlns:a="http://schemas.openxmlformats.org/drawingml/2006/main"/>
           <a:p xmlns:a="http://schemas.openxmlformats.org/drawingml/2006/main">
             <a:pPr algn="l">
-              <a:buNone/>
-            </a:pPr>
-            <a:r>
-              <a:rPr sz="1650" b="0">
+              <a:lnSpc>
+                <a:spcPct val="112000"/>
+              </a:lnSpc>
+              <a:buNone/>
+              <a:defRPr sz="1350"/>
+            </a:pPr>
+            <a:r>
+              <a:rPr sz="1350" b="0">
                 <a:solidFill>
                   <a:srgbClr val="60646C"/>
                 </a:solidFill>
@@ -9618,10 +9713,14 @@
           <a:lstStyle xmlns:a="http://schemas.openxmlformats.org/drawingml/2006/main"/>
           <a:p xmlns:a="http://schemas.openxmlformats.org/drawingml/2006/main">
             <a:pPr algn="l">
-              <a:buNone/>
-            </a:pPr>
-            <a:r>
-              <a:rPr sz="2100" b="1">
+              <a:lnSpc>
+                <a:spcPct val="108000"/>
+              </a:lnSpc>
+              <a:buNone/>
+              <a:defRPr sz="1350" b="0"/>
+            </a:pPr>
+            <a:r>
+              <a:rPr sz="1350" b="0">
                 <a:solidFill>
                   <a:srgbClr val="000000"/>
                 </a:solidFill>
@@ -9665,10 +9764,14 @@
           <a:lstStyle xmlns:a="http://schemas.openxmlformats.org/drawingml/2006/main"/>
           <a:p xmlns:a="http://schemas.openxmlformats.org/drawingml/2006/main">
             <a:pPr algn="l">
-              <a:buNone/>
-            </a:pPr>
-            <a:r>
-              <a:rPr sz="1650" b="0">
+              <a:lnSpc>
+                <a:spcPct val="112000"/>
+              </a:lnSpc>
+              <a:buNone/>
+              <a:defRPr sz="1350"/>
+            </a:pPr>
+            <a:r>
+              <a:rPr sz="1350" b="0">
                 <a:solidFill>
                   <a:srgbClr val="60646C"/>
                 </a:solidFill>
@@ -10759,10 +10862,14 @@
           <a:lstStyle xmlns:a="http://schemas.openxmlformats.org/drawingml/2006/main"/>
           <a:p xmlns:a="http://schemas.openxmlformats.org/drawingml/2006/main">
             <a:pPr algn="l">
-              <a:buNone/>
-            </a:pPr>
-            <a:r>
-              <a:rPr sz="3750" b="1">
+              <a:lnSpc>
+                <a:spcPct val="98000"/>
+              </a:lnSpc>
+              <a:buNone/>
+              <a:defRPr sz="3525" b="1"/>
+            </a:pPr>
+            <a:r>
+              <a:rPr sz="3525" b="1">
                 <a:solidFill>
                   <a:srgbClr val="000000"/>
                 </a:solidFill>
@@ -10861,10 +10968,14 @@
           <a:lstStyle xmlns:a="http://schemas.openxmlformats.org/drawingml/2006/main"/>
           <a:p xmlns:a="http://schemas.openxmlformats.org/drawingml/2006/main">
             <a:pPr algn="l">
-              <a:buNone/>
-            </a:pPr>
-            <a:r>
-              <a:rPr sz="2250" b="1">
+              <a:lnSpc>
+                <a:spcPct val="108000"/>
+              </a:lnSpc>
+              <a:buNone/>
+              <a:defRPr sz="1725" b="1"/>
+            </a:pPr>
+            <a:r>
+              <a:rPr sz="1725" b="1">
                 <a:solidFill>
                   <a:srgbClr val="000000"/>
                 </a:solidFill>
@@ -10908,10 +11019,14 @@
           <a:lstStyle xmlns:a="http://schemas.openxmlformats.org/drawingml/2006/main"/>
           <a:p xmlns:a="http://schemas.openxmlformats.org/drawingml/2006/main">
             <a:pPr algn="l">
-              <a:buNone/>
-            </a:pPr>
-            <a:r>
-              <a:rPr sz="1575" b="1">
+              <a:lnSpc>
+                <a:spcPct val="108000"/>
+              </a:lnSpc>
+              <a:buNone/>
+              <a:defRPr sz="1350" b="0"/>
+            </a:pPr>
+            <a:r>
+              <a:rPr sz="1350" b="0">
                 <a:solidFill>
                   <a:srgbClr val="3D8DFF"/>
                 </a:solidFill>
@@ -10955,10 +11070,14 @@
           <a:lstStyle xmlns:a="http://schemas.openxmlformats.org/drawingml/2006/main"/>
           <a:p xmlns:a="http://schemas.openxmlformats.org/drawingml/2006/main">
             <a:pPr algn="l">
-              <a:buNone/>
-            </a:pPr>
-            <a:r>
-              <a:rPr sz="1575" b="0">
+              <a:lnSpc>
+                <a:spcPct val="108000"/>
+              </a:lnSpc>
+              <a:buNone/>
+              <a:defRPr sz="1350" b="0"/>
+            </a:pPr>
+            <a:r>
+              <a:rPr sz="1350" b="0">
                 <a:solidFill>
                   <a:srgbClr val="000000"/>
                 </a:solidFill>
@@ -11002,10 +11121,14 @@
           <a:lstStyle xmlns:a="http://schemas.openxmlformats.org/drawingml/2006/main"/>
           <a:p xmlns:a="http://schemas.openxmlformats.org/drawingml/2006/main">
             <a:pPr algn="l">
-              <a:buNone/>
-            </a:pPr>
-            <a:r>
-              <a:rPr sz="1575" b="1">
+              <a:lnSpc>
+                <a:spcPct val="108000"/>
+              </a:lnSpc>
+              <a:buNone/>
+              <a:defRPr sz="1350" b="0"/>
+            </a:pPr>
+            <a:r>
+              <a:rPr sz="1350" b="0">
                 <a:solidFill>
                   <a:srgbClr val="3D8DFF"/>
                 </a:solidFill>
@@ -11049,10 +11172,14 @@
           <a:lstStyle xmlns:a="http://schemas.openxmlformats.org/drawingml/2006/main"/>
           <a:p xmlns:a="http://schemas.openxmlformats.org/drawingml/2006/main">
             <a:pPr algn="l">
-              <a:buNone/>
-            </a:pPr>
-            <a:r>
-              <a:rPr sz="1575" b="0">
+              <a:lnSpc>
+                <a:spcPct val="108000"/>
+              </a:lnSpc>
+              <a:buNone/>
+              <a:defRPr sz="1350" b="0"/>
+            </a:pPr>
+            <a:r>
+              <a:rPr sz="1350" b="0">
                 <a:solidFill>
                   <a:srgbClr val="000000"/>
                 </a:solidFill>
@@ -11096,10 +11223,14 @@
           <a:lstStyle xmlns:a="http://schemas.openxmlformats.org/drawingml/2006/main"/>
           <a:p xmlns:a="http://schemas.openxmlformats.org/drawingml/2006/main">
             <a:pPr algn="l">
-              <a:buNone/>
-            </a:pPr>
-            <a:r>
-              <a:rPr sz="1575" b="1">
+              <a:lnSpc>
+                <a:spcPct val="108000"/>
+              </a:lnSpc>
+              <a:buNone/>
+              <a:defRPr sz="1350" b="0"/>
+            </a:pPr>
+            <a:r>
+              <a:rPr sz="1350" b="0">
                 <a:solidFill>
                   <a:srgbClr val="3D8DFF"/>
                 </a:solidFill>
@@ -11143,10 +11274,14 @@
           <a:lstStyle xmlns:a="http://schemas.openxmlformats.org/drawingml/2006/main"/>
           <a:p xmlns:a="http://schemas.openxmlformats.org/drawingml/2006/main">
             <a:pPr algn="l">
-              <a:buNone/>
-            </a:pPr>
-            <a:r>
-              <a:rPr sz="1575" b="0">
+              <a:lnSpc>
+                <a:spcPct val="108000"/>
+              </a:lnSpc>
+              <a:buNone/>
+              <a:defRPr sz="1350" b="0"/>
+            </a:pPr>
+            <a:r>
+              <a:rPr sz="1350" b="0">
                 <a:solidFill>
                   <a:srgbClr val="000000"/>
                 </a:solidFill>
@@ -11339,10 +11474,14 @@
           <a:lstStyle xmlns:a="http://schemas.openxmlformats.org/drawingml/2006/main"/>
           <a:p xmlns:a="http://schemas.openxmlformats.org/drawingml/2006/main">
             <a:pPr algn="l">
-              <a:buNone/>
-            </a:pPr>
-            <a:r>
-              <a:rPr sz="2250" b="1">
+              <a:lnSpc>
+                <a:spcPct val="108000"/>
+              </a:lnSpc>
+              <a:buNone/>
+              <a:defRPr sz="1725" b="1"/>
+            </a:pPr>
+            <a:r>
+              <a:rPr sz="1725" b="1">
                 <a:solidFill>
                   <a:srgbClr val="000000"/>
                 </a:solidFill>
@@ -11386,10 +11525,14 @@
           <a:lstStyle xmlns:a="http://schemas.openxmlformats.org/drawingml/2006/main"/>
           <a:p xmlns:a="http://schemas.openxmlformats.org/drawingml/2006/main">
             <a:pPr algn="l">
-              <a:buNone/>
-            </a:pPr>
-            <a:r>
-              <a:rPr sz="1575" b="1">
+              <a:lnSpc>
+                <a:spcPct val="108000"/>
+              </a:lnSpc>
+              <a:buNone/>
+              <a:defRPr sz="1350" b="0"/>
+            </a:pPr>
+            <a:r>
+              <a:rPr sz="1350" b="0">
                 <a:solidFill>
                   <a:srgbClr val="3D8DFF"/>
                 </a:solidFill>
@@ -11433,10 +11576,14 @@
           <a:lstStyle xmlns:a="http://schemas.openxmlformats.org/drawingml/2006/main"/>
           <a:p xmlns:a="http://schemas.openxmlformats.org/drawingml/2006/main">
             <a:pPr algn="l">
-              <a:buNone/>
-            </a:pPr>
-            <a:r>
-              <a:rPr sz="1575" b="0">
+              <a:lnSpc>
+                <a:spcPct val="108000"/>
+              </a:lnSpc>
+              <a:buNone/>
+              <a:defRPr sz="1350" b="0"/>
+            </a:pPr>
+            <a:r>
+              <a:rPr sz="1350" b="0">
                 <a:solidFill>
                   <a:srgbClr val="000000"/>
                 </a:solidFill>
@@ -11480,10 +11627,14 @@
           <a:lstStyle xmlns:a="http://schemas.openxmlformats.org/drawingml/2006/main"/>
           <a:p xmlns:a="http://schemas.openxmlformats.org/drawingml/2006/main">
             <a:pPr algn="l">
-              <a:buNone/>
-            </a:pPr>
-            <a:r>
-              <a:rPr sz="1575" b="1">
+              <a:lnSpc>
+                <a:spcPct val="108000"/>
+              </a:lnSpc>
+              <a:buNone/>
+              <a:defRPr sz="1350" b="0"/>
+            </a:pPr>
+            <a:r>
+              <a:rPr sz="1350" b="0">
                 <a:solidFill>
                   <a:srgbClr val="3D8DFF"/>
                 </a:solidFill>
@@ -11527,10 +11678,14 @@
           <a:lstStyle xmlns:a="http://schemas.openxmlformats.org/drawingml/2006/main"/>
           <a:p xmlns:a="http://schemas.openxmlformats.org/drawingml/2006/main">
             <a:pPr algn="l">
-              <a:buNone/>
-            </a:pPr>
-            <a:r>
-              <a:rPr sz="1575" b="0">
+              <a:lnSpc>
+                <a:spcPct val="108000"/>
+              </a:lnSpc>
+              <a:buNone/>
+              <a:defRPr sz="1350" b="0"/>
+            </a:pPr>
+            <a:r>
+              <a:rPr sz="1350" b="0">
                 <a:solidFill>
                   <a:srgbClr val="000000"/>
                 </a:solidFill>
@@ -11574,10 +11729,14 @@
           <a:lstStyle xmlns:a="http://schemas.openxmlformats.org/drawingml/2006/main"/>
           <a:p xmlns:a="http://schemas.openxmlformats.org/drawingml/2006/main">
             <a:pPr algn="l">
-              <a:buNone/>
-            </a:pPr>
-            <a:r>
-              <a:rPr sz="1575" b="1">
+              <a:lnSpc>
+                <a:spcPct val="108000"/>
+              </a:lnSpc>
+              <a:buNone/>
+              <a:defRPr sz="1350" b="0"/>
+            </a:pPr>
+            <a:r>
+              <a:rPr sz="1350" b="0">
                 <a:solidFill>
                   <a:srgbClr val="3D8DFF"/>
                 </a:solidFill>
@@ -11621,10 +11780,14 @@
           <a:lstStyle xmlns:a="http://schemas.openxmlformats.org/drawingml/2006/main"/>
           <a:p xmlns:a="http://schemas.openxmlformats.org/drawingml/2006/main">
             <a:pPr algn="l">
-              <a:buNone/>
-            </a:pPr>
-            <a:r>
-              <a:rPr sz="1575" b="0">
+              <a:lnSpc>
+                <a:spcPct val="108000"/>
+              </a:lnSpc>
+              <a:buNone/>
+              <a:defRPr sz="1350" b="0"/>
+            </a:pPr>
+            <a:r>
+              <a:rPr sz="1350" b="0">
                 <a:solidFill>
                   <a:srgbClr val="000000"/>
                 </a:solidFill>
@@ -12535,10 +12698,14 @@
           <a:lstStyle xmlns:a="http://schemas.openxmlformats.org/drawingml/2006/main"/>
           <a:p xmlns:a="http://schemas.openxmlformats.org/drawingml/2006/main">
             <a:pPr algn="l">
-              <a:buNone/>
-            </a:pPr>
-            <a:r>
-              <a:rPr sz="3750" b="1">
+              <a:lnSpc>
+                <a:spcPct val="98000"/>
+              </a:lnSpc>
+              <a:buNone/>
+              <a:defRPr sz="3525" b="1"/>
+            </a:pPr>
+            <a:r>
+              <a:rPr sz="3525" b="1">
                 <a:solidFill>
                   <a:srgbClr val="000000"/>
                 </a:solidFill>
@@ -12567,7 +12734,7 @@
         </p:nvSpPr>
         <p:spPr>
           <a:xfrm xmlns:a="http://schemas.openxmlformats.org/drawingml/2006/main">
-            <a:off x="-76200" y="3314700"/>
+            <a:off x="114300" y="3314700"/>
             <a:ext cx="1981200" cy="1504950"/>
           </a:xfrm>
           <a:prstGeom xmlns:a="http://schemas.openxmlformats.org/drawingml/2006/main" prst="rect">
@@ -12622,7 +12789,7 @@
         </p:nvSpPr>
         <p:spPr>
           <a:xfrm xmlns:a="http://schemas.openxmlformats.org/drawingml/2006/main">
-            <a:off x="19050" y="3694700"/>
+            <a:off x="209550" y="3694700"/>
             <a:ext cx="1790700" cy="400050"/>
           </a:xfrm>
           <a:prstGeom xmlns:a="http://schemas.openxmlformats.org/drawingml/2006/main" prst="rect">
@@ -12637,10 +12804,14 @@
           <a:lstStyle xmlns:a="http://schemas.openxmlformats.org/drawingml/2006/main"/>
           <a:p xmlns:a="http://schemas.openxmlformats.org/drawingml/2006/main">
             <a:pPr algn="ctr">
-              <a:buNone/>
-            </a:pPr>
-            <a:r>
-              <a:rPr sz="2000" b="1">
+              <a:lnSpc>
+                <a:spcPct val="108000"/>
+              </a:lnSpc>
+              <a:buNone/>
+              <a:defRPr sz="1725" b="1"/>
+            </a:pPr>
+            <a:r>
+              <a:rPr sz="1725" b="1">
                 <a:solidFill>
                   <a:srgbClr val="000000"/>
                 </a:solidFill>
@@ -12669,7 +12840,7 @@
         </p:nvSpPr>
         <p:spPr>
           <a:xfrm xmlns:a="http://schemas.openxmlformats.org/drawingml/2006/main">
-            <a:off x="19050" y="4114800"/>
+            <a:off x="209550" y="4114800"/>
             <a:ext cx="1790700" cy="500000"/>
           </a:xfrm>
           <a:prstGeom xmlns:a="http://schemas.openxmlformats.org/drawingml/2006/main" prst="rect">
@@ -12684,7 +12855,11 @@
           <a:lstStyle xmlns:a="http://schemas.openxmlformats.org/drawingml/2006/main"/>
           <a:p xmlns:a="http://schemas.openxmlformats.org/drawingml/2006/main">
             <a:pPr algn="ctr">
-              <a:buNone/>
+              <a:lnSpc>
+                <a:spcPct val="108000"/>
+              </a:lnSpc>
+              <a:buNone/>
+              <a:defRPr sz="1350" b="0"/>
             </a:pPr>
             <a:r>
               <a:rPr sz="1350" b="0">
@@ -12841,10 +13016,14 @@
           <a:lstStyle xmlns:a="http://schemas.openxmlformats.org/drawingml/2006/main"/>
           <a:p xmlns:a="http://schemas.openxmlformats.org/drawingml/2006/main">
             <a:pPr algn="ctr">
-              <a:buNone/>
-            </a:pPr>
-            <a:r>
-              <a:rPr sz="2000" b="1">
+              <a:lnSpc>
+                <a:spcPct val="108000"/>
+              </a:lnSpc>
+              <a:buNone/>
+              <a:defRPr sz="1725" b="1"/>
+            </a:pPr>
+            <a:r>
+              <a:rPr sz="1725" b="1">
                 <a:solidFill>
                   <a:srgbClr val="000000"/>
                 </a:solidFill>
@@ -12888,7 +13067,11 @@
           <a:lstStyle xmlns:a="http://schemas.openxmlformats.org/drawingml/2006/main"/>
           <a:p xmlns:a="http://schemas.openxmlformats.org/drawingml/2006/main">
             <a:pPr algn="ctr">
-              <a:buNone/>
+              <a:lnSpc>
+                <a:spcPct val="108000"/>
+              </a:lnSpc>
+              <a:buNone/>
+              <a:defRPr sz="1350" b="0"/>
             </a:pPr>
             <a:r>
               <a:rPr sz="1350" b="0">
@@ -13045,10 +13228,14 @@
           <a:lstStyle xmlns:a="http://schemas.openxmlformats.org/drawingml/2006/main"/>
           <a:p xmlns:a="http://schemas.openxmlformats.org/drawingml/2006/main">
             <a:pPr algn="ctr">
-              <a:buNone/>
-            </a:pPr>
-            <a:r>
-              <a:rPr sz="2000" b="1">
+              <a:lnSpc>
+                <a:spcPct val="108000"/>
+              </a:lnSpc>
+              <a:buNone/>
+              <a:defRPr sz="1725" b="1"/>
+            </a:pPr>
+            <a:r>
+              <a:rPr sz="1725" b="1">
                 <a:solidFill>
                   <a:srgbClr val="000000"/>
                 </a:solidFill>
@@ -13092,7 +13279,11 @@
           <a:lstStyle xmlns:a="http://schemas.openxmlformats.org/drawingml/2006/main"/>
           <a:p xmlns:a="http://schemas.openxmlformats.org/drawingml/2006/main">
             <a:pPr algn="ctr">
-              <a:buNone/>
+              <a:lnSpc>
+                <a:spcPct val="108000"/>
+              </a:lnSpc>
+              <a:buNone/>
+              <a:defRPr sz="1350" b="0"/>
             </a:pPr>
             <a:r>
               <a:rPr sz="1350" b="0">
@@ -13249,10 +13440,14 @@
           <a:lstStyle xmlns:a="http://schemas.openxmlformats.org/drawingml/2006/main"/>
           <a:p xmlns:a="http://schemas.openxmlformats.org/drawingml/2006/main">
             <a:pPr algn="ctr">
-              <a:buNone/>
-            </a:pPr>
-            <a:r>
-              <a:rPr sz="2000" b="1">
+              <a:lnSpc>
+                <a:spcPct val="108000"/>
+              </a:lnSpc>
+              <a:buNone/>
+              <a:defRPr sz="1725" b="1"/>
+            </a:pPr>
+            <a:r>
+              <a:rPr sz="1725" b="1">
                 <a:solidFill>
                   <a:srgbClr val="000000"/>
                 </a:solidFill>
@@ -13296,7 +13491,11 @@
           <a:lstStyle xmlns:a="http://schemas.openxmlformats.org/drawingml/2006/main"/>
           <a:p xmlns:a="http://schemas.openxmlformats.org/drawingml/2006/main">
             <a:pPr algn="ctr">
-              <a:buNone/>
+              <a:lnSpc>
+                <a:spcPct val="108000"/>
+              </a:lnSpc>
+              <a:buNone/>
+              <a:defRPr sz="1350" b="0"/>
             </a:pPr>
             <a:r>
               <a:rPr sz="1350" b="0">
@@ -13383,7 +13582,7 @@
         </p:nvSpPr>
         <p:spPr>
           <a:xfrm xmlns:a="http://schemas.openxmlformats.org/drawingml/2006/main">
-            <a:off x="10287000" y="3314700"/>
+            <a:off x="10096500" y="3314700"/>
             <a:ext cx="1981200" cy="1504950"/>
           </a:xfrm>
           <a:prstGeom xmlns:a="http://schemas.openxmlformats.org/drawingml/2006/main" prst="rect">
@@ -13438,7 +13637,7 @@
         </p:nvSpPr>
         <p:spPr>
           <a:xfrm xmlns:a="http://schemas.openxmlformats.org/drawingml/2006/main">
-            <a:off x="10382250" y="3694700"/>
+            <a:off x="10191750" y="3694700"/>
             <a:ext cx="1790700" cy="400050"/>
           </a:xfrm>
           <a:prstGeom xmlns:a="http://schemas.openxmlformats.org/drawingml/2006/main" prst="rect">
@@ -13453,10 +13652,14 @@
           <a:lstStyle xmlns:a="http://schemas.openxmlformats.org/drawingml/2006/main"/>
           <a:p xmlns:a="http://schemas.openxmlformats.org/drawingml/2006/main">
             <a:pPr algn="ctr">
-              <a:buNone/>
-            </a:pPr>
-            <a:r>
-              <a:rPr sz="2000" b="1">
+              <a:lnSpc>
+                <a:spcPct val="108000"/>
+              </a:lnSpc>
+              <a:buNone/>
+              <a:defRPr sz="1725" b="1"/>
+            </a:pPr>
+            <a:r>
+              <a:rPr sz="1725" b="1">
                 <a:solidFill>
                   <a:srgbClr val="000000"/>
                 </a:solidFill>
@@ -13485,7 +13688,7 @@
         </p:nvSpPr>
         <p:spPr>
           <a:xfrm xmlns:a="http://schemas.openxmlformats.org/drawingml/2006/main">
-            <a:off x="10382250" y="4114800"/>
+            <a:off x="10191750" y="4114800"/>
             <a:ext cx="1790700" cy="500000"/>
           </a:xfrm>
           <a:prstGeom xmlns:a="http://schemas.openxmlformats.org/drawingml/2006/main" prst="rect">
@@ -13500,7 +13703,11 @@
           <a:lstStyle xmlns:a="http://schemas.openxmlformats.org/drawingml/2006/main"/>
           <a:p xmlns:a="http://schemas.openxmlformats.org/drawingml/2006/main">
             <a:pPr algn="ctr">
-              <a:buNone/>
+              <a:lnSpc>
+                <a:spcPct val="108000"/>
+              </a:lnSpc>
+              <a:buNone/>
+              <a:defRPr sz="1350" b="0"/>
             </a:pPr>
             <a:r>
               <a:rPr sz="1350" b="0">
@@ -13532,8 +13739,8 @@
         </p:nvSpPr>
         <p:spPr>
           <a:xfrm xmlns:a="http://schemas.openxmlformats.org/drawingml/2006/main">
-            <a:off x="1676400" y="5181600"/>
-            <a:ext cx="8839200" cy="600075"/>
+            <a:off x="1676400" y="5448300"/>
+            <a:ext cx="8839200" cy="457200"/>
           </a:xfrm>
           <a:prstGeom xmlns:a="http://schemas.openxmlformats.org/drawingml/2006/main" prst="rect">
             <a:avLst/>
@@ -13547,10 +13754,14 @@
           <a:lstStyle xmlns:a="http://schemas.openxmlformats.org/drawingml/2006/main"/>
           <a:p xmlns:a="http://schemas.openxmlformats.org/drawingml/2006/main">
             <a:pPr algn="ctr">
-              <a:buNone/>
-            </a:pPr>
-            <a:r>
-              <a:rPr sz="2100" b="1">
+              <a:lnSpc>
+                <a:spcPct val="105000"/>
+              </a:lnSpc>
+              <a:buNone/>
+              <a:defRPr sz="1500"/>
+            </a:pPr>
+            <a:r>
+              <a:rPr sz="1500" b="1">
                 <a:solidFill>
                   <a:srgbClr val="000000"/>
                 </a:solidFill>
